--- a/docs/sentinel-ml-presentation.pptx
+++ b/docs/sentinel-ml-presentation.pptx
@@ -4356,7 +4356,7 @@
                   <a:srgbClr val="FFFFFF"/>
                 </a:solidFill>
               </a:rPr>
-              <a:t>sentinel-ml (port 8080)</a:t>
+              <a:t>sentinel-ml (port 8100)</a:t>
             </a:r>
           </a:p>
         </p:txBody>
